--- a/05-da-v8-introduction-python/17-python-introduction.pptx
+++ b/05-da-v8-introduction-python/17-python-introduction.pptx
@@ -102,7 +102,7 @@
                 <a:tab algn="l" pos="0"/>
               </a:tabLst>
             </a:pPr>
-            <a:fld id="{8857CC43-0C48-4A6D-87C7-11246F6685C2}" type="slidenum">
+            <a:fld id="{AE323453-34AC-4D32-A0E6-35D92DD4D982}" type="slidenum">
               <a:rPr b="0" lang="en" sz="1000" strike="noStrike" u="none">
                 <a:solidFill>
                   <a:schemeClr val="dk2"/>
@@ -818,7 +818,7 @@
                 <a:tab algn="l" pos="0"/>
               </a:tabLst>
             </a:pPr>
-            <a:fld id="{892011C7-3C45-419E-92E0-346F7C22C1B0}" type="slidenum">
+            <a:fld id="{3307EF48-0CBD-49B6-9D6E-94F5F03D13EC}" type="slidenum">
               <a:rPr b="0" lang="en" sz="1000" strike="noStrike" u="none">
                 <a:solidFill>
                   <a:schemeClr val="dk2"/>
@@ -2082,7 +2082,7 @@
                 <a:tab algn="l" pos="0"/>
               </a:tabLst>
             </a:pPr>
-            <a:fld id="{DAE97C73-A330-4A54-B903-2E1645CC1A83}" type="slidenum">
+            <a:fld id="{C6580237-0661-4940-A2AA-20D143F66A3E}" type="slidenum">
               <a:rPr b="0" lang="en" sz="1000" strike="noStrike" u="none">
                 <a:solidFill>
                   <a:schemeClr val="dk2"/>
@@ -3894,7 +3894,7 @@
                 <a:tab algn="l" pos="0"/>
               </a:tabLst>
             </a:pPr>
-            <a:fld id="{4ED6444D-CD68-4750-960E-48E820903040}" type="slidenum">
+            <a:fld id="{0EDA71AC-0A1F-4CED-ADED-87910111E65A}" type="slidenum">
               <a:rPr b="0" lang="en" sz="1000" strike="noStrike" u="none">
                 <a:solidFill>
                   <a:schemeClr val="dk2"/>
@@ -4003,7 +4003,7 @@
                 <a:tab algn="l" pos="0"/>
               </a:tabLst>
             </a:pPr>
-            <a:fld id="{7DC73A78-9A31-481A-BE84-4B3D03654793}" type="slidenum">
+            <a:fld id="{5AB895BA-C982-478E-8CBD-79BA8588D1A8}" type="slidenum">
               <a:rPr b="0" lang="en" sz="1000" strike="noStrike" u="none">
                 <a:solidFill>
                   <a:schemeClr val="dk2"/>
@@ -4504,7 +4504,7 @@
                 <a:tab algn="l" pos="0"/>
               </a:tabLst>
             </a:pPr>
-            <a:fld id="{86A16DA7-267B-4ED4-9B83-ADE345DCD082}" type="slidenum">
+            <a:fld id="{0B6326B4-BB53-4CEB-A3A0-EACE5482F954}" type="slidenum">
               <a:rPr b="0" lang="en" sz="1000" strike="noStrike" u="none">
                 <a:solidFill>
                   <a:schemeClr val="dk2"/>
@@ -4946,7 +4946,7 @@
                 <a:tab algn="l" pos="0"/>
               </a:tabLst>
             </a:pPr>
-            <a:fld id="{74868810-94E5-48DF-97C3-D1218D842E71}" type="slidenum">
+            <a:fld id="{A52C7E15-FFE1-46D2-96E7-FE38BE10124E}" type="slidenum">
               <a:rPr b="0" lang="en" sz="1000" strike="noStrike" u="none">
                 <a:solidFill>
                   <a:schemeClr val="dk2"/>
@@ -5662,7 +5662,7 @@
                 <a:tab algn="l" pos="0"/>
               </a:tabLst>
             </a:pPr>
-            <a:fld id="{11338FBE-FA6C-406F-BDAD-D4DCB16BE33A}" type="slidenum">
+            <a:fld id="{1E72E472-406B-496E-A042-F866018496FB}" type="slidenum">
               <a:rPr b="0" lang="en" sz="1000" strike="noStrike" u="none">
                 <a:solidFill>
                   <a:schemeClr val="dk2"/>
@@ -5830,7 +5830,7 @@
                 <a:tab algn="l" pos="0"/>
               </a:tabLst>
             </a:pPr>
-            <a:fld id="{D98A3DB8-0F8B-422A-BC5D-202635FE4EA6}" type="slidenum">
+            <a:fld id="{AEB30A17-FB88-4BC9-AFDD-8B8B3200FD76}" type="slidenum">
               <a:rPr b="0" lang="en" sz="1000" strike="noStrike" u="none">
                 <a:solidFill>
                   <a:schemeClr val="dk2"/>
@@ -5939,7 +5939,7 @@
                 <a:tab algn="l" pos="0"/>
               </a:tabLst>
             </a:pPr>
-            <a:fld id="{0C450816-16A1-481D-8081-74713673CC44}" type="slidenum">
+            <a:fld id="{3D82DCB5-0F96-41E3-A9DA-3403FF5812BA}" type="slidenum">
               <a:rPr b="0" lang="en" sz="1000" strike="noStrike" u="none">
                 <a:solidFill>
                   <a:schemeClr val="dk2"/>
@@ -6929,7 +6929,7 @@
                 <a:tab algn="l" pos="0"/>
               </a:tabLst>
             </a:pPr>
-            <a:fld id="{DA567D39-9FF1-437F-A7F1-BC2B0C223179}" type="slidenum">
+            <a:fld id="{289AEE98-9767-45CB-A2AC-1B92DB48E061}" type="slidenum">
               <a:rPr b="0" lang="en" sz="1000" strike="noStrike" u="none">
                 <a:solidFill>
                   <a:schemeClr val="dk2"/>
@@ -7097,7 +7097,7 @@
                 <a:tab algn="l" pos="0"/>
               </a:tabLst>
             </a:pPr>
-            <a:fld id="{029CB4EE-FECB-405A-923C-C441F96CAFEA}" type="slidenum">
+            <a:fld id="{982E03E8-ADF4-48C7-987A-7E39D78218E9}" type="slidenum">
               <a:rPr b="0" lang="en" sz="1000" strike="noStrike" u="none">
                 <a:solidFill>
                   <a:schemeClr val="dk2"/>
@@ -8087,7 +8087,7 @@
                 <a:tab algn="l" pos="0"/>
               </a:tabLst>
             </a:pPr>
-            <a:fld id="{8038049A-3D13-4981-89AE-999F52614888}" type="slidenum">
+            <a:fld id="{C69F2569-F094-4893-BC6B-097CAD137A8A}" type="slidenum">
               <a:rPr b="0" lang="en" sz="1000" strike="noStrike" u="none">
                 <a:solidFill>
                   <a:schemeClr val="dk2"/>
@@ -9077,7 +9077,7 @@
                 <a:tab algn="l" pos="0"/>
               </a:tabLst>
             </a:pPr>
-            <a:fld id="{24E08D6A-45C9-4F7C-99B4-C0D986EF4822}" type="slidenum">
+            <a:fld id="{64130321-C825-43B3-BB19-895DF43020A4}" type="slidenum">
               <a:rPr b="0" lang="en" sz="1000" strike="noStrike" u="none">
                 <a:solidFill>
                   <a:schemeClr val="dk2"/>
@@ -9793,7 +9793,7 @@
                 <a:tab algn="l" pos="0"/>
               </a:tabLst>
             </a:pPr>
-            <a:fld id="{0CA3C5D2-6F4A-4DDE-84B3-93020BAEC7D3}" type="slidenum">
+            <a:fld id="{58F3DE5E-6566-4E1B-AA6A-34F6166DFEFA}" type="slidenum">
               <a:rPr b="0" lang="en" sz="1000" strike="noStrike" u="none">
                 <a:solidFill>
                   <a:schemeClr val="dk2"/>
@@ -11057,7 +11057,7 @@
                 <a:tab algn="l" pos="0"/>
               </a:tabLst>
             </a:pPr>
-            <a:fld id="{15B7A711-F863-43E6-ADB4-AD153449B070}" type="slidenum">
+            <a:fld id="{2DB621A9-683A-4062-9E1B-F217F1445ABA}" type="slidenum">
               <a:rPr b="0" lang="en" sz="1000" strike="noStrike" u="none">
                 <a:solidFill>
                   <a:schemeClr val="dk2"/>
@@ -12869,7 +12869,7 @@
                 <a:tab algn="l" pos="0"/>
               </a:tabLst>
             </a:pPr>
-            <a:fld id="{B38C8E68-8EF1-4014-B1A9-DE2E7726312A}" type="slidenum">
+            <a:fld id="{B165D390-8C9B-4E0F-B76A-5A93E148383E}" type="slidenum">
               <a:rPr b="0" lang="en" sz="1000" strike="noStrike" u="none">
                 <a:solidFill>
                   <a:schemeClr val="dk2"/>
@@ -12928,7 +12928,7 @@
         <p:txBody>
           <a:bodyPr/>
           <a:p>
-            <a:fld id="{DE84ACC9-2FF2-43E3-91A2-E29217005450}" type="slidenum">
+            <a:fld id="{3DF543B8-B2FA-4F62-9FCD-0B4BD3134300}" type="slidenum">
               <a:t>&lt;#&gt;</a:t>
             </a:fld>
           </a:p>
@@ -12970,7 +12970,7 @@
         <p:txBody>
           <a:bodyPr/>
           <a:p>
-            <a:fld id="{756F399D-FC6A-4CDE-A05B-E2E4EC400154}" type="slidenum">
+            <a:fld id="{A0CB40A7-7A34-4D4F-B4D4-AF3C166895B3}" type="slidenum">
               <a:t>&lt;#&gt;</a:t>
             </a:fld>
           </a:p>
@@ -13395,7 +13395,7 @@
                 <a:tab algn="l" pos="0"/>
               </a:tabLst>
             </a:pPr>
-            <a:fld id="{82866428-9D31-4DFA-B1C7-93720431558E}" type="slidenum">
+            <a:fld id="{4D3186C1-A3EC-44B4-99FD-9E99917C66C8}" type="slidenum">
               <a:rPr b="0" lang="en" sz="1000" strike="noStrike" u="none">
                 <a:solidFill>
                   <a:schemeClr val="dk2"/>
@@ -14111,7 +14111,7 @@
                 <a:tab algn="l" pos="0"/>
               </a:tabLst>
             </a:pPr>
-            <a:fld id="{80B51387-23FF-484D-A62F-03730F03DBCD}" type="slidenum">
+            <a:fld id="{7E0CB3A4-7717-4164-A90B-7F434644EC93}" type="slidenum">
               <a:rPr b="0" lang="en" sz="1000" strike="noStrike" u="none">
                 <a:solidFill>
                   <a:schemeClr val="dk2"/>
@@ -14279,7 +14279,7 @@
                 <a:tab algn="l" pos="0"/>
               </a:tabLst>
             </a:pPr>
-            <a:fld id="{D46C0EB8-96B5-4353-9DDE-9F908DE353B5}" type="slidenum">
+            <a:fld id="{669ABEAC-CD7A-41A0-8F76-097D2BEC5F91}" type="slidenum">
               <a:rPr b="0" lang="en" sz="1000" strike="noStrike" u="none">
                 <a:solidFill>
                   <a:schemeClr val="dk2"/>
@@ -14388,7 +14388,7 @@
                 <a:tab algn="l" pos="0"/>
               </a:tabLst>
             </a:pPr>
-            <a:fld id="{79283419-9246-48E5-9EC4-98AF43BB0BA8}" type="slidenum">
+            <a:fld id="{57413C88-48A8-4557-8F54-96B6FE25F29A}" type="slidenum">
               <a:rPr b="0" lang="en" sz="1000" strike="noStrike" u="none">
                 <a:solidFill>
                   <a:schemeClr val="dk2"/>
@@ -15378,7 +15378,7 @@
                 <a:tab algn="l" pos="0"/>
               </a:tabLst>
             </a:pPr>
-            <a:fld id="{AA25BD1E-089E-4FA3-B9D4-96519F872795}" type="slidenum">
+            <a:fld id="{F8743CFC-1331-4098-9F05-E5FF8EF2A55B}" type="slidenum">
               <a:rPr b="0" lang="en" sz="1000" strike="noStrike" u="none">
                 <a:solidFill>
                   <a:schemeClr val="dk2"/>
@@ -16368,7 +16368,7 @@
                 <a:tab algn="l" pos="0"/>
               </a:tabLst>
             </a:pPr>
-            <a:fld id="{3545D6EC-01B2-4FC7-B03C-4080D479D23C}" type="slidenum">
+            <a:fld id="{20B3BEA8-9ED1-4BF5-BE07-F66740932A6E}" type="slidenum">
               <a:rPr b="0" lang="en" sz="1000" strike="noStrike" u="none">
                 <a:solidFill>
                   <a:schemeClr val="dk2"/>
@@ -17358,7 +17358,7 @@
                 <a:tab algn="l" pos="0"/>
               </a:tabLst>
             </a:pPr>
-            <a:fld id="{48A5E813-57D0-44C0-BD71-118986AD45FC}" type="slidenum">
+            <a:fld id="{7AF7376F-5C31-4073-8919-E8F1750A1A99}" type="slidenum">
               <a:rPr b="0" lang="en" sz="1000" strike="noStrike" u="none">
                 <a:solidFill>
                   <a:schemeClr val="dk2"/>
@@ -17541,7 +17541,7 @@
                 <a:tab algn="l" pos="0"/>
               </a:tabLst>
             </a:pPr>
-            <a:fld id="{053BDD1C-40D1-4314-A67C-5E5D919D78EA}" type="slidenum">
+            <a:fld id="{ACF8EA9A-22A3-4EFE-95CA-F835B0EE2F30}" type="slidenum">
               <a:rPr b="0" lang="en" sz="1000" strike="noStrike" u="none">
                 <a:solidFill>
                   <a:schemeClr val="dk2"/>
@@ -17960,7 +17960,7 @@
                 <a:tab algn="l" pos="0"/>
               </a:tabLst>
             </a:pPr>
-            <a:fld id="{D671CACA-63AC-4454-BFF4-55BFDD62A662}" type="slidenum">
+            <a:fld id="{93D8847C-774A-4BEB-B511-E04D72113C67}" type="slidenum">
               <a:rPr b="0" lang="en" sz="1000" strike="noStrike" u="none">
                 <a:solidFill>
                   <a:schemeClr val="dk2"/>
@@ -18460,7 +18460,7 @@
                 <a:tab algn="l" pos="0"/>
               </a:tabLst>
             </a:pPr>
-            <a:fld id="{644FAC75-8EBF-454B-AE9E-3D6675A6727A}" type="datetime5">
+            <a:fld id="{45DEA07D-18F1-4E24-B053-A017B5B7D241}" type="datetime5">
               <a:rPr b="0" lang="en" sz="1200" strike="noStrike" u="none">
                 <a:solidFill>
                   <a:srgbClr val="2a2a2a"/>
